--- a/dist/초6/수학/연산과비례/초6_수학_연산과비례_04_소수의나눗셈2_학생용.pptx
+++ b/dist/초6/수학/연산과비례/초6_수학_연산과비례_04_소수의나눗셈2_학생용.pptx
@@ -120,13 +120,13 @@
   <p:extLst>
     <p:ext uri="{521415D9-36F7-43E2-AB2F-B90AF26B5E84}">
       <p14:sectionLst xmlns:p14="http://schemas.microsoft.com/office/powerpoint/2010/main">
-        <p14:section name="도입" id="{1c851415-17c8-ef56-2025-d7575ca36d42}">
+        <p14:section name="도입" id="{08a0ae3d-e044-3355-4816-4de2853c5622}">
           <p14:sldIdLst>
             <p14:sldId id="256"/>
             <p14:sldId id="257"/>
           </p14:sldIdLst>
         </p14:section>
-        <p14:section name="개념" id="{a9965b77-c17c-2118-fe16-5fab5460b63a}">
+        <p14:section name="개념" id="{271c74bc-7732-6633-48d4-f81de95cf3f1}">
           <p14:sldIdLst>
             <p14:sldId id="258"/>
             <p14:sldId id="259"/>
@@ -134,7 +134,7 @@
             <p14:sldId id="263"/>
           </p14:sldIdLst>
         </p14:section>
-        <p14:section name="연습" id="{3e8a231b-ce74-b29e-3f74-707c7b879994}">
+        <p14:section name="연습" id="{8a46887e-bcc2-229c-cdf4-f654f040281c}">
           <p14:sldIdLst>
             <p14:sldId id="260"/>
             <p14:sldId id="261"/>
@@ -142,24 +142,24 @@
             <p14:sldId id="265"/>
           </p14:sldIdLst>
         </p14:section>
-        <p14:section name="개념" id="{eda8f28e-6bd2-0a9b-d31d-47fb106b2ccd}">
+        <p14:section name="개념" id="{22ca0209-78c1-9f45-f895-8c54af138ce1}">
           <p14:sldIdLst/>
         </p14:section>
-        <p14:section name="연습" id="{44742c54-cc50-8a06-45b4-840eb408854b}">
+        <p14:section name="연습" id="{978db4b6-90e5-13d2-551e-daec46d9064b}">
           <p14:sldIdLst/>
         </p14:section>
-        <p14:section name="확인" id="{18d39a2e-5d4f-cdc6-2975-f782f5428750}">
+        <p14:section name="확인" id="{8cddd1fe-7832-7d8c-d413-3ade2d6173a0}">
           <p14:sldIdLst>
             <p14:sldId id="266"/>
             <p14:sldId id="267"/>
           </p14:sldIdLst>
         </p14:section>
-        <p14:section name="정리" id="{abcf01c6-459e-dd44-7601-ef8835770608}">
+        <p14:section name="정리" id="{dbe8f522-1290-5e98-79bf-91dd32bf698f}">
           <p14:sldIdLst>
             <p14:sldId id="268"/>
           </p14:sldIdLst>
         </p14:section>
-        <p14:section name="보충" id="{16e38cc1-6dc5-ce47-4c19-5cf4f717ead1}">
+        <p14:section name="보충" id="{b3a94092-a282-12ec-4c5c-9da86f141e58}">
           <p14:sldIdLst>
             <p14:sldId id="269"/>
           </p14:sldIdLst>
@@ -2844,7 +2844,7 @@
                 <a:ea typeface="맑은 고딕" pitchFamily="34" charset="-122"/>
                 <a:cs typeface="맑은 고딕" pitchFamily="34" charset="-120"/>
               </a:rPr>
-              <a:t>1.8 m 끈을 0.3 m씩 자르면</a:t>
+              <a:t>1.8 m 끈을 0.3 m씩 자르면</a:t>
             </a:r>
             <a:endParaRPr lang="ko-KR" sz="2800" dirty="0"/>
           </a:p>
@@ -3144,7 +3144,7 @@
                 <a:ea typeface="맑은 고딕" pitchFamily="34" charset="-122"/>
                 <a:cs typeface="맑은 고딕" pitchFamily="34" charset="-120"/>
               </a:rPr>
-              <a:t>물 6.3 L를 0.5 L 병에 가득 담았어요.</a:t>
+              <a:t>물 6.3 L를 0.5 L 병에 가득 담았어요.</a:t>
             </a:r>
             <a:endParaRPr lang="ko-KR" sz="2800" dirty="0"/>
           </a:p>
@@ -3213,7 +3213,7 @@
                 <a:ea typeface="맑은 고딕" pitchFamily="34" charset="-122"/>
                 <a:cs typeface="맑은 고딕" pitchFamily="34" charset="-120"/>
               </a:rPr>
-              <a:t>남는 물이 병 하나(0.5 L)보다 많을 수 있을까요?</a:t>
+              <a:t>남는 물이 병 하나(0.5 L)보다 많을 수 있을까요?</a:t>
             </a:r>
             <a:endParaRPr lang="ko-KR" sz="2800" dirty="0"/>
           </a:p>
@@ -3260,7 +3260,7 @@
                 <a:ea typeface="맑은 고딕" pitchFamily="34" charset="-122"/>
                 <a:cs typeface="맑은 고딕" pitchFamily="34" charset="-120"/>
               </a:rPr>
-              <a:t>토끼: 12병, 3 L</a:t>
+              <a:t>토끼: 12병, 3 L</a:t>
             </a:r>
             <a:endParaRPr lang="ko-KR" sz="2200" dirty="0"/>
           </a:p>
@@ -3316,7 +3316,7 @@
                 <a:ea typeface="맑은 고딕" pitchFamily="34" charset="-122"/>
                 <a:cs typeface="맑은 고딕" pitchFamily="34" charset="-120"/>
               </a:rPr>
-              <a:t>남는 양은 3 L예요.</a:t>
+              <a:t>남는 양은 3 L예요.</a:t>
             </a:r>
             <a:endParaRPr lang="ko-KR" sz="2800" dirty="0"/>
           </a:p>
@@ -3363,7 +3363,7 @@
                 <a:ea typeface="맑은 고딕" pitchFamily="34" charset="-122"/>
                 <a:cs typeface="맑은 고딕" pitchFamily="34" charset="-120"/>
               </a:rPr>
-              <a:t>곰: 12병, 0.3 L</a:t>
+              <a:t>곰: 12병, 0.3 L</a:t>
             </a:r>
             <a:endParaRPr lang="ko-KR" sz="2200" dirty="0"/>
           </a:p>
@@ -3911,7 +3911,7 @@
                 <a:ea typeface="맑은 고딕" pitchFamily="34" charset="-122"/>
                 <a:cs typeface="맑은 고딕" pitchFamily="34" charset="-120"/>
               </a:rPr>
-              <a:t>끈 8.5 m를 1.2 m씩</a:t>
+              <a:t>끈 8.5 m를 1.2 m씩</a:t>
             </a:r>
             <a:endParaRPr lang="ko-KR" sz="2800" dirty="0"/>
           </a:p>
@@ -4145,7 +4145,7 @@
                 <a:ea typeface="맑은 고딕" pitchFamily="34" charset="-122"/>
                 <a:cs typeface="맑은 고딕" pitchFamily="34" charset="-120"/>
               </a:rPr>
-              <a:t>고구마 7.4 kg을 0.6 kg씩 봉지에 담으면</a:t>
+              <a:t>고구마 7.4 kg을 0.6 kg씩 봉지에 담으면</a:t>
             </a:r>
             <a:endParaRPr lang="ko-KR" sz="2800" dirty="0"/>
           </a:p>
@@ -4248,7 +4248,7 @@
                 <a:ea typeface="맑은 고딕" pitchFamily="34" charset="-122"/>
                 <a:cs typeface="맑은 고딕" pitchFamily="34" charset="-120"/>
               </a:rPr>
-              <a:t>키가 1.5 m인 사람의 그림자가 2.2 m예요.</a:t>
+              <a:t>키가 1.5 m인 사람의 그림자가 2.2 m예요.</a:t>
             </a:r>
             <a:endParaRPr lang="ko-KR" sz="2800" dirty="0"/>
           </a:p>
@@ -5180,7 +5180,7 @@
           </p:nvPr>
         </p:nvGraphicFramePr>
         <p:xfrm>
-          <a:off x="4448556" y="2058924"/>
+          <a:off x="4448556" y="2074164"/>
           <a:ext cx="3291840" cy="914400"/>
         </p:xfrm>
         <a:graphic>
@@ -5192,7 +5192,7 @@
                 <a:gridCol w="987552"/>
                 <a:gridCol w="987552"/>
               </a:tblGrid>
-              <a:tr h="393700">
+              <a:tr h="388620">
                 <a:tc>
                   <a:txBody>
                     <a:bodyPr/>
@@ -5202,7 +5202,7 @@
                         <a:buNone/>
                       </a:pPr>
                       <a:r>
-                        <a:rPr lang="en-US" sz="2000" b="1" dirty="0">
+                        <a:rPr lang="en-US" sz="1800" b="1" dirty="0">
                           <a:solidFill>
                             <a:srgbClr val="1F2937"/>
                           </a:solidFill>
@@ -5212,7 +5212,7 @@
                         </a:rPr>
                         <a:t>몫</a:t>
                       </a:r>
-                      <a:endParaRPr lang="en-US" sz="2000" dirty="0">
+                      <a:endParaRPr lang="en-US" sz="1800" dirty="0">
                         <a:latin typeface="맑은 고딕" charset="0"/>
                         <a:ea typeface="맑은 고딕" charset="0"/>
                         <a:cs typeface="맑은 고딕" charset="0"/>
@@ -5270,7 +5270,7 @@
                         <a:buNone/>
                       </a:pPr>
                       <a:r>
-                        <a:rPr lang="en-US" sz="2000" dirty="0">
+                        <a:rPr lang="en-US" sz="1800" dirty="0">
                           <a:solidFill>
                             <a:srgbClr val="1F2937"/>
                           </a:solidFill>
@@ -5280,7 +5280,7 @@
                         </a:rPr>
                         <a:t>2.</a:t>
                       </a:r>
-                      <a:endParaRPr lang="en-US" sz="2000" dirty="0">
+                      <a:endParaRPr lang="en-US" sz="1800" dirty="0">
                         <a:latin typeface="맑은 고딕" charset="0"/>
                         <a:ea typeface="맑은 고딕" charset="0"/>
                         <a:cs typeface="맑은 고딕" charset="0"/>
@@ -5338,7 +5338,7 @@
                         <a:buNone/>
                       </a:pPr>
                       <a:r>
-                        <a:rPr lang="en-US" sz="2000" dirty="0">
+                        <a:rPr lang="en-US" sz="1800" dirty="0">
                           <a:solidFill>
                             <a:srgbClr val="1F2937"/>
                           </a:solidFill>
@@ -5348,7 +5348,7 @@
                         </a:rPr>
                         <a:t>1</a:t>
                       </a:r>
-                      <a:endParaRPr lang="en-US" sz="2000" dirty="0">
+                      <a:endParaRPr lang="en-US" sz="1800" dirty="0">
                         <a:latin typeface="맑은 고딕" charset="0"/>
                         <a:ea typeface="맑은 고딕" charset="0"/>
                         <a:cs typeface="맑은 고딕" charset="0"/>
@@ -5398,7 +5398,7 @@
                   </a:tcPr>
                 </a:tc>
               </a:tr>
-              <a:tr h="393700">
+              <a:tr h="388620">
                 <a:tc>
                   <a:txBody>
                     <a:bodyPr/>
@@ -5408,7 +5408,7 @@
                         <a:buNone/>
                       </a:pPr>
                       <a:r>
-                        <a:rPr lang="en-US" sz="2000" b="1" dirty="0">
+                        <a:rPr lang="en-US" sz="1800" b="1" dirty="0">
                           <a:solidFill>
                             <a:srgbClr val="1F2937"/>
                           </a:solidFill>
@@ -5418,7 +5418,7 @@
                         </a:rPr>
                         <a:t>4 )</a:t>
                       </a:r>
-                      <a:endParaRPr lang="en-US" sz="2000" dirty="0">
+                      <a:endParaRPr lang="en-US" sz="1800" dirty="0">
                         <a:latin typeface="맑은 고딕" charset="0"/>
                         <a:ea typeface="맑은 고딕" charset="0"/>
                         <a:cs typeface="맑은 고딕" charset="0"/>
@@ -5476,7 +5476,7 @@
                         <a:buNone/>
                       </a:pPr>
                       <a:r>
-                        <a:rPr lang="en-US" sz="2000" dirty="0">
+                        <a:rPr lang="en-US" sz="1800" dirty="0">
                           <a:solidFill>
                             <a:srgbClr val="1F2937"/>
                           </a:solidFill>
@@ -5486,7 +5486,7 @@
                         </a:rPr>
                         <a:t>8.</a:t>
                       </a:r>
-                      <a:endParaRPr lang="en-US" sz="2000" dirty="0">
+                      <a:endParaRPr lang="en-US" sz="1800" dirty="0">
                         <a:latin typeface="맑은 고딕" charset="0"/>
                         <a:ea typeface="맑은 고딕" charset="0"/>
                         <a:cs typeface="맑은 고딕" charset="0"/>
@@ -5544,7 +5544,7 @@
                         <a:buNone/>
                       </a:pPr>
                       <a:r>
-                        <a:rPr lang="en-US" sz="2000" dirty="0">
+                        <a:rPr lang="en-US" sz="1800" dirty="0">
                           <a:solidFill>
                             <a:srgbClr val="1F2937"/>
                           </a:solidFill>
@@ -5554,7 +5554,7 @@
                         </a:rPr>
                         <a:t>4</a:t>
                       </a:r>
-                      <a:endParaRPr lang="en-US" sz="2000" dirty="0">
+                      <a:endParaRPr lang="en-US" sz="1800" dirty="0">
                         <a:latin typeface="맑은 고딕" charset="0"/>
                         <a:ea typeface="맑은 고딕" charset="0"/>
                         <a:cs typeface="맑은 고딕" charset="0"/>
@@ -5604,7 +5604,7 @@
                   </a:tcPr>
                 </a:tc>
               </a:tr>
-              <a:tr h="393700">
+              <a:tr h="388620">
                 <a:tc>
                   <a:txBody>
                     <a:bodyPr/>
@@ -5614,7 +5614,7 @@
                         <a:buNone/>
                       </a:pPr>
                       <a:r>
-                        <a:rPr lang="en-US" sz="2000" b="1" dirty="0">
+                        <a:rPr lang="en-US" sz="1800" b="1" dirty="0">
                           <a:solidFill>
                             <a:srgbClr val="1F2937"/>
                           </a:solidFill>
@@ -5624,7 +5624,7 @@
                         </a:rPr>
                         <a:t>4 × 2</a:t>
                       </a:r>
-                      <a:endParaRPr lang="en-US" sz="2000" dirty="0">
+                      <a:endParaRPr lang="en-US" sz="1800" dirty="0">
                         <a:latin typeface="맑은 고딕" charset="0"/>
                         <a:ea typeface="맑은 고딕" charset="0"/>
                         <a:cs typeface="맑은 고딕" charset="0"/>
@@ -5682,7 +5682,7 @@
                         <a:buNone/>
                       </a:pPr>
                       <a:r>
-                        <a:rPr lang="en-US" sz="2000" dirty="0">
+                        <a:rPr lang="en-US" sz="1800" dirty="0">
                           <a:solidFill>
                             <a:srgbClr val="1F2937"/>
                           </a:solidFill>
@@ -5692,7 +5692,7 @@
                         </a:rPr>
                         <a:t>8</a:t>
                       </a:r>
-                      <a:endParaRPr lang="en-US" sz="2000" dirty="0">
+                      <a:endParaRPr lang="en-US" sz="1800" dirty="0">
                         <a:latin typeface="맑은 고딕" charset="0"/>
                         <a:ea typeface="맑은 고딕" charset="0"/>
                         <a:cs typeface="맑은 고딕" charset="0"/>
@@ -5749,7 +5749,7 @@
                       <a:pPr eaLnBrk="0" algn="ctr" indent="0" marL="0">
                         <a:buNone/>
                       </a:pPr>
-                      <a:endParaRPr lang="en-US" sz="2000" dirty="0">
+                      <a:endParaRPr lang="en-US" sz="1800" dirty="0">
                         <a:latin typeface="맑은 고딕" charset="0"/>
                         <a:ea typeface="맑은 고딕" charset="0"/>
                         <a:cs typeface="맑은 고딕" charset="0"/>
@@ -5799,7 +5799,7 @@
                   </a:tcPr>
                 </a:tc>
               </a:tr>
-              <a:tr h="393700">
+              <a:tr h="388620">
                 <a:tc>
                   <a:txBody>
                     <a:bodyPr/>
@@ -5809,7 +5809,7 @@
                         <a:buNone/>
                       </a:pPr>
                       <a:r>
-                        <a:rPr lang="en-US" sz="2000" b="1" dirty="0">
+                        <a:rPr lang="en-US" sz="1800" b="1" dirty="0">
                           <a:solidFill>
                             <a:srgbClr val="1F2937"/>
                           </a:solidFill>
@@ -5819,7 +5819,7 @@
                         </a:rPr>
                         <a:t>내리기</a:t>
                       </a:r>
-                      <a:endParaRPr lang="en-US" sz="2000" dirty="0">
+                      <a:endParaRPr lang="en-US" sz="1800" dirty="0">
                         <a:latin typeface="맑은 고딕" charset="0"/>
                         <a:ea typeface="맑은 고딕" charset="0"/>
                         <a:cs typeface="맑은 고딕" charset="0"/>
@@ -5876,7 +5876,7 @@
                       <a:pPr eaLnBrk="0" algn="ctr" indent="0" marL="0">
                         <a:buNone/>
                       </a:pPr>
-                      <a:endParaRPr lang="en-US" sz="2000" dirty="0">
+                      <a:endParaRPr lang="en-US" sz="1800" dirty="0">
                         <a:latin typeface="맑은 고딕" charset="0"/>
                         <a:ea typeface="맑은 고딕" charset="0"/>
                         <a:cs typeface="맑은 고딕" charset="0"/>
@@ -5934,7 +5934,7 @@
                         <a:buNone/>
                       </a:pPr>
                       <a:r>
-                        <a:rPr lang="en-US" sz="2000" dirty="0">
+                        <a:rPr lang="en-US" sz="1800" dirty="0">
                           <a:solidFill>
                             <a:srgbClr val="1F2937"/>
                           </a:solidFill>
@@ -5944,7 +5944,7 @@
                         </a:rPr>
                         <a:t>4</a:t>
                       </a:r>
-                      <a:endParaRPr lang="en-US" sz="2000" dirty="0">
+                      <a:endParaRPr lang="en-US" sz="1800" dirty="0">
                         <a:latin typeface="맑은 고딕" charset="0"/>
                         <a:ea typeface="맑은 고딕" charset="0"/>
                         <a:cs typeface="맑은 고딕" charset="0"/>
@@ -5994,7 +5994,7 @@
                   </a:tcPr>
                 </a:tc>
               </a:tr>
-              <a:tr h="393700">
+              <a:tr h="388620">
                 <a:tc>
                   <a:txBody>
                     <a:bodyPr/>
@@ -6004,7 +6004,7 @@
                         <a:buNone/>
                       </a:pPr>
                       <a:r>
-                        <a:rPr lang="en-US" sz="2000" b="1" dirty="0">
+                        <a:rPr lang="en-US" sz="1800" b="1" dirty="0">
                           <a:solidFill>
                             <a:srgbClr val="1F2937"/>
                           </a:solidFill>
@@ -6014,7 +6014,7 @@
                         </a:rPr>
                         <a:t>4 × 1</a:t>
                       </a:r>
-                      <a:endParaRPr lang="en-US" sz="2000" dirty="0">
+                      <a:endParaRPr lang="en-US" sz="1800" dirty="0">
                         <a:latin typeface="맑은 고딕" charset="0"/>
                         <a:ea typeface="맑은 고딕" charset="0"/>
                         <a:cs typeface="맑은 고딕" charset="0"/>
@@ -6071,7 +6071,7 @@
                       <a:pPr eaLnBrk="0" algn="ctr" indent="0" marL="0">
                         <a:buNone/>
                       </a:pPr>
-                      <a:endParaRPr lang="en-US" sz="2000" dirty="0">
+                      <a:endParaRPr lang="en-US" sz="1800" dirty="0">
                         <a:latin typeface="맑은 고딕" charset="0"/>
                         <a:ea typeface="맑은 고딕" charset="0"/>
                         <a:cs typeface="맑은 고딕" charset="0"/>
@@ -6129,7 +6129,7 @@
                         <a:buNone/>
                       </a:pPr>
                       <a:r>
-                        <a:rPr lang="en-US" sz="2000" dirty="0">
+                        <a:rPr lang="en-US" sz="1800" dirty="0">
                           <a:solidFill>
                             <a:srgbClr val="1F2937"/>
                           </a:solidFill>
@@ -6139,7 +6139,7 @@
                         </a:rPr>
                         <a:t>4</a:t>
                       </a:r>
-                      <a:endParaRPr lang="en-US" sz="2000" dirty="0">
+                      <a:endParaRPr lang="en-US" sz="1800" dirty="0">
                         <a:latin typeface="맑은 고딕" charset="0"/>
                         <a:ea typeface="맑은 고딕" charset="0"/>
                         <a:cs typeface="맑은 고딕" charset="0"/>
@@ -6189,7 +6189,7 @@
                   </a:tcPr>
                 </a:tc>
               </a:tr>
-              <a:tr h="393700">
+              <a:tr h="388620">
                 <a:tc>
                   <a:txBody>
                     <a:bodyPr/>
@@ -6199,7 +6199,7 @@
                         <a:buNone/>
                       </a:pPr>
                       <a:r>
-                        <a:rPr lang="en-US" sz="2000" b="1" dirty="0">
+                        <a:rPr lang="en-US" sz="1800" b="1" dirty="0">
                           <a:solidFill>
                             <a:srgbClr val="1F2937"/>
                           </a:solidFill>
@@ -6209,7 +6209,7 @@
                         </a:rPr>
                         <a:t>나머지</a:t>
                       </a:r>
-                      <a:endParaRPr lang="en-US" sz="2000" dirty="0">
+                      <a:endParaRPr lang="en-US" sz="1800" dirty="0">
                         <a:latin typeface="맑은 고딕" charset="0"/>
                         <a:ea typeface="맑은 고딕" charset="0"/>
                         <a:cs typeface="맑은 고딕" charset="0"/>
@@ -6266,7 +6266,7 @@
                       <a:pPr eaLnBrk="0" algn="ctr" indent="0" marL="0">
                         <a:buNone/>
                       </a:pPr>
-                      <a:endParaRPr lang="en-US" sz="2000" dirty="0">
+                      <a:endParaRPr lang="en-US" sz="1800" dirty="0">
                         <a:latin typeface="맑은 고딕" charset="0"/>
                         <a:ea typeface="맑은 고딕" charset="0"/>
                         <a:cs typeface="맑은 고딕" charset="0"/>
@@ -6324,7 +6324,7 @@
                         <a:buNone/>
                       </a:pPr>
                       <a:r>
-                        <a:rPr lang="en-US" sz="2000" dirty="0">
+                        <a:rPr lang="en-US" sz="1800" dirty="0">
                           <a:solidFill>
                             <a:srgbClr val="1F2937"/>
                           </a:solidFill>
@@ -6334,7 +6334,7 @@
                         </a:rPr>
                         <a:t>0</a:t>
                       </a:r>
-                      <a:endParaRPr lang="en-US" sz="2000" dirty="0">
+                      <a:endParaRPr lang="en-US" sz="1800" dirty="0">
                         <a:latin typeface="맑은 고딕" charset="0"/>
                         <a:ea typeface="맑은 고딕" charset="0"/>
                         <a:cs typeface="맑은 고딕" charset="0"/>
@@ -8734,7 +8734,7 @@
           </p:nvPr>
         </p:nvGraphicFramePr>
         <p:xfrm>
-          <a:off x="7376190" y="2030730"/>
+          <a:off x="7376190" y="2028444"/>
           <a:ext cx="4023360" cy="914400"/>
         </p:xfrm>
         <a:graphic>
@@ -8747,7 +8747,7 @@
                 <a:gridCol w="804672"/>
                 <a:gridCol w="804672"/>
               </a:tblGrid>
-              <a:tr h="511810">
+              <a:tr h="512572">
                 <a:tc>
                   <a:txBody>
                     <a:bodyPr/>
@@ -9010,7 +9010,7 @@
                   </a:tcPr>
                 </a:tc>
               </a:tr>
-              <a:tr h="511810">
+              <a:tr h="512572">
                 <a:tc>
                   <a:txBody>
                     <a:bodyPr/>
@@ -9284,7 +9284,7 @@
                   </a:tcPr>
                 </a:tc>
               </a:tr>
-              <a:tr h="511810">
+              <a:tr h="512572">
                 <a:tc>
                   <a:txBody>
                     <a:bodyPr/>
@@ -9547,7 +9547,7 @@
                   </a:tcPr>
                 </a:tc>
               </a:tr>
-              <a:tr h="511810">
+              <a:tr h="512572">
                 <a:tc>
                   <a:txBody>
                     <a:bodyPr/>
@@ -9810,7 +9810,7 @@
                   </a:tcPr>
                 </a:tc>
               </a:tr>
-              <a:tr h="511810">
+              <a:tr h="512572">
                 <a:tc>
                   <a:txBody>
                     <a:bodyPr/>
@@ -10073,7 +10073,7 @@
                   </a:tcPr>
                 </a:tc>
               </a:tr>
-              <a:tr h="511810">
+              <a:tr h="512572">
                 <a:tc>
                   <a:txBody>
                     <a:bodyPr/>
@@ -11841,7 +11841,7 @@
           </p:nvPr>
         </p:nvGraphicFramePr>
         <p:xfrm>
-          <a:off x="7123862" y="2564892"/>
+          <a:off x="7123862" y="2494788"/>
           <a:ext cx="4206240" cy="914400"/>
         </p:xfrm>
         <a:graphic>
@@ -11855,7 +11855,7 @@
                 <a:gridCol w="715061"/>
                 <a:gridCol w="715061"/>
               </a:tblGrid>
-              <a:tr h="433070">
+              <a:tr h="450596">
                 <a:tc>
                   <a:txBody>
                     <a:bodyPr/>
@@ -12186,7 +12186,7 @@
                   </a:tcPr>
                 </a:tc>
               </a:tr>
-              <a:tr h="433070">
+              <a:tr h="450596">
                 <a:tc>
                   <a:txBody>
                     <a:bodyPr/>
@@ -12528,7 +12528,7 @@
                   </a:tcPr>
                 </a:tc>
               </a:tr>
-              <a:tr h="433070">
+              <a:tr h="450596">
                 <a:tc>
                   <a:txBody>
                     <a:bodyPr/>
@@ -12848,7 +12848,7 @@
                   </a:tcPr>
                 </a:tc>
               </a:tr>
-              <a:tr h="433070">
+              <a:tr h="450596">
                 <a:tc>
                   <a:txBody>
                     <a:bodyPr/>
@@ -13168,7 +13168,7 @@
                   </a:tcPr>
                 </a:tc>
               </a:tr>
-              <a:tr h="433070">
+              <a:tr h="450596">
                 <a:tc>
                   <a:txBody>
                     <a:bodyPr/>
@@ -13477,7 +13477,7 @@
                   </a:tcPr>
                 </a:tc>
               </a:tr>
-              <a:tr h="433070">
+              <a:tr h="450596">
                 <a:tc>
                   <a:txBody>
                     <a:bodyPr/>
@@ -13797,7 +13797,7 @@
                   </a:tcPr>
                 </a:tc>
               </a:tr>
-              <a:tr h="433070">
+              <a:tr h="450596">
                 <a:tc>
                   <a:txBody>
                     <a:bodyPr/>
@@ -14106,7 +14106,7 @@
                   </a:tcPr>
                 </a:tc>
               </a:tr>
-              <a:tr h="433070">
+              <a:tr h="450596">
                 <a:tc>
                   <a:txBody>
                     <a:bodyPr/>
@@ -14869,7 +14869,7 @@
                 <a:ea typeface="맑은 고딕" pitchFamily="34" charset="-122"/>
                 <a:cs typeface="맑은 고딕" pitchFamily="34" charset="-120"/>
               </a:rPr>
-              <a:t>주스 7.5 L를 한 사람에게 2 L씩 나누어 줘요.</a:t>
+              <a:t>주스 7.5 L를 한 사람에게 2 L씩 나누어 줘요.</a:t>
             </a:r>
             <a:endParaRPr lang="ko-KR" sz="2800" dirty="0"/>
           </a:p>
@@ -15156,7 +15156,7 @@
                 <a:ea typeface="맑은 고딕" pitchFamily="34" charset="-122"/>
                 <a:cs typeface="맑은 고딕" pitchFamily="34" charset="-120"/>
               </a:rPr>
-              <a:t>1.5 L가 남아요.</a:t>
+              <a:t>1.5 L가 남아요.</a:t>
             </a:r>
             <a:endParaRPr lang="ko-KR" sz="2800" dirty="0"/>
           </a:p>
@@ -15195,7 +15195,7 @@
                 <a:ea typeface="맑은 고딕" pitchFamily="34" charset="-122"/>
                 <a:cs typeface="맑은 고딕" pitchFamily="34" charset="-120"/>
               </a:rPr>
-              <a:t>7.5 L</a:t>
+              <a:t>7.5 L</a:t>
             </a:r>
             <a:endParaRPr lang="ko-KR" sz="2200" dirty="0"/>
           </a:p>
@@ -15797,7 +15797,7 @@
                 <a:ea typeface="맑은 고딕" pitchFamily="34" charset="-122"/>
                 <a:cs typeface="맑은 고딕" pitchFamily="34" charset="-120"/>
               </a:rPr>
-              <a:t>쌀 9.4 kg을 2 kg씩 담으면</a:t>
+              <a:t>쌀 9.4 kg을 2 kg씩 담으면</a:t>
             </a:r>
             <a:endParaRPr lang="ko-KR" sz="2800" dirty="0"/>
           </a:p>
